--- a/ppt/IoTAI10-KNN.pptx
+++ b/ppt/IoTAI10-KNN.pptx
@@ -5,10 +5,10 @@
     <p:sldMasterId id="2147483653" r:id="rId1"/>
   </p:sldMasterIdLst>
   <p:notesMasterIdLst>
-    <p:notesMasterId r:id="rId34"/>
+    <p:notesMasterId r:id="rId30"/>
   </p:notesMasterIdLst>
   <p:handoutMasterIdLst>
-    <p:handoutMasterId r:id="rId35"/>
+    <p:handoutMasterId r:id="rId31"/>
   </p:handoutMasterIdLst>
   <p:sldIdLst>
     <p:sldId id="264" r:id="rId2"/>
@@ -39,10 +39,6 @@
     <p:sldId id="298" r:id="rId27"/>
     <p:sldId id="299" r:id="rId28"/>
     <p:sldId id="302" r:id="rId29"/>
-    <p:sldId id="300" r:id="rId30"/>
-    <p:sldId id="281" r:id="rId31"/>
-    <p:sldId id="288" r:id="rId32"/>
-    <p:sldId id="301" r:id="rId33"/>
   </p:sldIdLst>
   <p:sldSz cx="9144000" cy="6858000" type="screen4x3"/>
   <p:notesSz cx="6648450" cy="9782175"/>
@@ -7032,114 +7028,6 @@
 </p:sld>
 </file>
 
-<file path=ppt/slides/slide29.xml><?xml version="1.0" encoding="utf-8"?>
-<p:sld xmlns:a="http://schemas.openxmlformats.org/drawingml/2006/main" xmlns:r="http://schemas.openxmlformats.org/officeDocument/2006/relationships" xmlns:p="http://schemas.openxmlformats.org/presentationml/2006/main">
-  <p:cSld>
-    <p:spTree>
-      <p:nvGrpSpPr>
-        <p:cNvPr id="1" name=""/>
-        <p:cNvGrpSpPr/>
-        <p:nvPr/>
-      </p:nvGrpSpPr>
-      <p:grpSpPr>
-        <a:xfrm>
-          <a:off x="0" y="0"/>
-          <a:ext cx="0" cy="0"/>
-          <a:chOff x="0" y="0"/>
-          <a:chExt cx="0" cy="0"/>
-        </a:xfrm>
-      </p:grpSpPr>
-      <p:sp>
-        <p:nvSpPr>
-          <p:cNvPr id="2" name="Titre 1">
-            <a:extLst>
-              <a:ext uri="{FF2B5EF4-FFF2-40B4-BE49-F238E27FC236}">
-                <a16:creationId xmlns:a16="http://schemas.microsoft.com/office/drawing/2014/main" id="{1E18199A-61EB-CD87-A2EC-D2009B3EA12D}"/>
-              </a:ext>
-            </a:extLst>
-          </p:cNvPr>
-          <p:cNvSpPr>
-            <a:spLocks noGrp="1"/>
-          </p:cNvSpPr>
-          <p:nvPr>
-            <p:ph type="title"/>
-          </p:nvPr>
-        </p:nvSpPr>
-        <p:spPr/>
-        <p:txBody>
-          <a:bodyPr/>
-          <a:lstStyle/>
-          <a:p>
-            <a:r>
-              <a:rPr lang="fr-FR" dirty="0" err="1"/>
-              <a:t>knn_lite</a:t>
-            </a:r>
-            <a:endParaRPr lang="fr-FR" dirty="0"/>
-          </a:p>
-        </p:txBody>
-      </p:sp>
-      <p:sp>
-        <p:nvSpPr>
-          <p:cNvPr id="3" name="Espace réservé du contenu 2">
-            <a:extLst>
-              <a:ext uri="{FF2B5EF4-FFF2-40B4-BE49-F238E27FC236}">
-                <a16:creationId xmlns:a16="http://schemas.microsoft.com/office/drawing/2014/main" id="{8AB7CD46-13C4-DCBA-ADD9-4BCD385A97A1}"/>
-              </a:ext>
-            </a:extLst>
-          </p:cNvPr>
-          <p:cNvSpPr>
-            <a:spLocks noGrp="1"/>
-          </p:cNvSpPr>
-          <p:nvPr>
-            <p:ph idx="1"/>
-          </p:nvPr>
-        </p:nvSpPr>
-        <p:spPr/>
-        <p:txBody>
-          <a:bodyPr/>
-          <a:lstStyle/>
-          <a:p>
-            <a:r>
-              <a:rPr lang="fr-FR" dirty="0"/>
-              <a:t>Implémentation Python d'une prédiction </a:t>
-            </a:r>
-            <a:r>
-              <a:rPr lang="fr-FR" dirty="0" err="1"/>
-              <a:t>kNN</a:t>
-            </a:r>
-            <a:endParaRPr lang="fr-FR" dirty="0"/>
-          </a:p>
-          <a:p>
-            <a:pPr lvl="1"/>
-            <a:r>
-              <a:rPr lang="fr-FR" dirty="0"/>
-              <a:t>Portable Python et </a:t>
-            </a:r>
-            <a:r>
-              <a:rPr lang="fr-FR" dirty="0" err="1"/>
-              <a:t>MicroPython</a:t>
-            </a:r>
-            <a:endParaRPr lang="fr-FR"/>
-          </a:p>
-          <a:p>
-            <a:pPr lvl="1"/>
-            <a:endParaRPr lang="fr-FR" dirty="0"/>
-          </a:p>
-        </p:txBody>
-      </p:sp>
-    </p:spTree>
-    <p:extLst>
-      <p:ext uri="{BB962C8B-B14F-4D97-AF65-F5344CB8AC3E}">
-        <p14:creationId xmlns:p14="http://schemas.microsoft.com/office/powerpoint/2010/main" val="2129001662"/>
-      </p:ext>
-    </p:extLst>
-  </p:cSld>
-  <p:clrMapOvr>
-    <a:masterClrMapping/>
-  </p:clrMapOvr>
-</p:sld>
-</file>
-
 <file path=ppt/slides/slide3.xml><?xml version="1.0" encoding="utf-8"?>
 <p:sld xmlns:a="http://schemas.openxmlformats.org/drawingml/2006/main" xmlns:r="http://schemas.openxmlformats.org/officeDocument/2006/relationships" xmlns:p="http://schemas.openxmlformats.org/presentationml/2006/main">
   <p:cSld>
@@ -7255,386 +7143,6 @@
     <p:extLst>
       <p:ext uri="{BB962C8B-B14F-4D97-AF65-F5344CB8AC3E}">
         <p14:creationId xmlns:p14="http://schemas.microsoft.com/office/powerpoint/2010/main" val="2764069817"/>
-      </p:ext>
-    </p:extLst>
-  </p:cSld>
-  <p:clrMapOvr>
-    <a:masterClrMapping/>
-  </p:clrMapOvr>
-</p:sld>
-</file>
-
-<file path=ppt/slides/slide30.xml><?xml version="1.0" encoding="utf-8"?>
-<p:sld xmlns:a="http://schemas.openxmlformats.org/drawingml/2006/main" xmlns:r="http://schemas.openxmlformats.org/officeDocument/2006/relationships" xmlns:p="http://schemas.openxmlformats.org/presentationml/2006/main">
-  <p:cSld>
-    <p:spTree>
-      <p:nvGrpSpPr>
-        <p:cNvPr id="1" name=""/>
-        <p:cNvGrpSpPr/>
-        <p:nvPr/>
-      </p:nvGrpSpPr>
-      <p:grpSpPr>
-        <a:xfrm>
-          <a:off x="0" y="0"/>
-          <a:ext cx="0" cy="0"/>
-          <a:chOff x="0" y="0"/>
-          <a:chExt cx="0" cy="0"/>
-        </a:xfrm>
-      </p:grpSpPr>
-      <p:sp>
-        <p:nvSpPr>
-          <p:cNvPr id="2" name="Titre 1"/>
-          <p:cNvSpPr>
-            <a:spLocks noGrp="1"/>
-          </p:cNvSpPr>
-          <p:nvPr>
-            <p:ph type="title"/>
-          </p:nvPr>
-        </p:nvSpPr>
-        <p:spPr/>
-        <p:txBody>
-          <a:bodyPr/>
-          <a:lstStyle/>
-          <a:p>
-            <a:r>
-              <a:rPr lang="fr-FR" dirty="0"/>
-              <a:t>MNIST</a:t>
-            </a:r>
-          </a:p>
-        </p:txBody>
-      </p:sp>
-      <p:sp>
-        <p:nvSpPr>
-          <p:cNvPr id="3" name="Espace réservé du contenu 2"/>
-          <p:cNvSpPr>
-            <a:spLocks noGrp="1"/>
-          </p:cNvSpPr>
-          <p:nvPr>
-            <p:ph idx="1"/>
-          </p:nvPr>
-        </p:nvSpPr>
-        <p:spPr/>
-        <p:txBody>
-          <a:bodyPr/>
-          <a:lstStyle/>
-          <a:p>
-            <a:r>
-              <a:rPr lang="fr-FR" dirty="0"/>
-              <a:t>MNIST est un </a:t>
-            </a:r>
-            <a:r>
-              <a:rPr lang="fr-FR" dirty="0" err="1"/>
-              <a:t>dataset</a:t>
-            </a:r>
-            <a:r>
-              <a:rPr lang="fr-FR" dirty="0"/>
-              <a:t> d'image manuscrites</a:t>
-            </a:r>
-          </a:p>
-        </p:txBody>
-      </p:sp>
-      <p:pic>
-        <p:nvPicPr>
-          <p:cNvPr id="4" name="Image 3"/>
-          <p:cNvPicPr>
-            <a:picLocks noChangeAspect="1"/>
-          </p:cNvPicPr>
-          <p:nvPr/>
-        </p:nvPicPr>
-        <p:blipFill>
-          <a:blip r:embed="rId2"/>
-          <a:stretch>
-            <a:fillRect/>
-          </a:stretch>
-        </p:blipFill>
-        <p:spPr>
-          <a:xfrm>
-            <a:off x="2699792" y="2132856"/>
-            <a:ext cx="4972050" cy="4019550"/>
-          </a:xfrm>
-          <a:prstGeom prst="rect">
-            <a:avLst/>
-          </a:prstGeom>
-        </p:spPr>
-      </p:pic>
-    </p:spTree>
-    <p:extLst>
-      <p:ext uri="{BB962C8B-B14F-4D97-AF65-F5344CB8AC3E}">
-        <p14:creationId xmlns:p14="http://schemas.microsoft.com/office/powerpoint/2010/main" val="969714780"/>
-      </p:ext>
-    </p:extLst>
-  </p:cSld>
-  <p:clrMapOvr>
-    <a:masterClrMapping/>
-  </p:clrMapOvr>
-</p:sld>
-</file>
-
-<file path=ppt/slides/slide31.xml><?xml version="1.0" encoding="utf-8"?>
-<p:sld xmlns:a="http://schemas.openxmlformats.org/drawingml/2006/main" xmlns:r="http://schemas.openxmlformats.org/officeDocument/2006/relationships" xmlns:p="http://schemas.openxmlformats.org/presentationml/2006/main">
-  <p:cSld>
-    <p:spTree>
-      <p:nvGrpSpPr>
-        <p:cNvPr id="1" name=""/>
-        <p:cNvGrpSpPr/>
-        <p:nvPr/>
-      </p:nvGrpSpPr>
-      <p:grpSpPr>
-        <a:xfrm>
-          <a:off x="0" y="0"/>
-          <a:ext cx="0" cy="0"/>
-          <a:chOff x="0" y="0"/>
-          <a:chExt cx="0" cy="0"/>
-        </a:xfrm>
-      </p:grpSpPr>
-      <p:sp>
-        <p:nvSpPr>
-          <p:cNvPr id="2" name="Titre 1">
-            <a:extLst>
-              <a:ext uri="{FF2B5EF4-FFF2-40B4-BE49-F238E27FC236}">
-                <a16:creationId xmlns:a16="http://schemas.microsoft.com/office/drawing/2014/main" id="{30695442-22FD-0396-D587-AEA15F5EE640}"/>
-              </a:ext>
-            </a:extLst>
-          </p:cNvPr>
-          <p:cNvSpPr>
-            <a:spLocks noGrp="1"/>
-          </p:cNvSpPr>
-          <p:nvPr>
-            <p:ph type="title"/>
-          </p:nvPr>
-        </p:nvSpPr>
-        <p:spPr/>
-        <p:txBody>
-          <a:bodyPr/>
-          <a:lstStyle/>
-          <a:p>
-            <a:r>
-              <a:rPr lang="fr-FR" dirty="0"/>
-              <a:t>MNIST</a:t>
-            </a:r>
-          </a:p>
-        </p:txBody>
-      </p:sp>
-      <p:sp>
-        <p:nvSpPr>
-          <p:cNvPr id="3" name="Espace réservé du contenu 2">
-            <a:extLst>
-              <a:ext uri="{FF2B5EF4-FFF2-40B4-BE49-F238E27FC236}">
-                <a16:creationId xmlns:a16="http://schemas.microsoft.com/office/drawing/2014/main" id="{40837D36-F38E-472C-2D09-4CBD2DB72B57}"/>
-              </a:ext>
-            </a:extLst>
-          </p:cNvPr>
-          <p:cNvSpPr>
-            <a:spLocks noGrp="1"/>
-          </p:cNvSpPr>
-          <p:nvPr>
-            <p:ph idx="1"/>
-          </p:nvPr>
-        </p:nvSpPr>
-        <p:spPr/>
-        <p:txBody>
-          <a:bodyPr/>
-          <a:lstStyle/>
-          <a:p>
-            <a:r>
-              <a:rPr lang="fr-FR" dirty="0"/>
-              <a:t>Les images sont en 28*28 sur 8 bits</a:t>
-            </a:r>
-          </a:p>
-          <a:p>
-            <a:r>
-              <a:rPr lang="fr-FR" dirty="0"/>
-              <a:t>Il s'agit d'un </a:t>
-            </a:r>
-            <a:r>
-              <a:rPr lang="fr-FR" dirty="0" err="1"/>
-              <a:t>trainingset</a:t>
-            </a:r>
-            <a:r>
-              <a:rPr lang="fr-FR" dirty="0"/>
-              <a:t> de 60000 images</a:t>
-            </a:r>
-          </a:p>
-          <a:p>
-            <a:r>
-              <a:rPr lang="fr-FR" dirty="0"/>
-              <a:t>Etude des poids</a:t>
-            </a:r>
-          </a:p>
-          <a:p>
-            <a:pPr lvl="1"/>
-            <a:r>
-              <a:rPr lang="fr-FR" dirty="0"/>
-              <a:t>x = 28*28 = 784 </a:t>
-            </a:r>
-            <a:r>
-              <a:rPr lang="fr-FR" dirty="0" err="1"/>
-              <a:t>features</a:t>
-            </a:r>
-            <a:endParaRPr lang="fr-FR" dirty="0"/>
-          </a:p>
-          <a:p>
-            <a:pPr lvl="1"/>
-            <a:r>
-              <a:rPr lang="fr-FR" dirty="0" err="1"/>
-              <a:t>xtrain</a:t>
-            </a:r>
-            <a:r>
-              <a:rPr lang="fr-FR" dirty="0"/>
-              <a:t> = 60000*784 = 47Mdata =&gt; 47Mo en 8 bits</a:t>
-            </a:r>
-          </a:p>
-          <a:p>
-            <a:pPr lvl="1"/>
-            <a:r>
-              <a:rPr lang="fr-FR" dirty="0"/>
-              <a:t>Impossible sur microcontrôleur</a:t>
-            </a:r>
-          </a:p>
-          <a:p>
-            <a:endParaRPr lang="fr-FR" dirty="0"/>
-          </a:p>
-        </p:txBody>
-      </p:sp>
-    </p:spTree>
-    <p:extLst>
-      <p:ext uri="{BB962C8B-B14F-4D97-AF65-F5344CB8AC3E}">
-        <p14:creationId xmlns:p14="http://schemas.microsoft.com/office/powerpoint/2010/main" val="2329841119"/>
-      </p:ext>
-    </p:extLst>
-  </p:cSld>
-  <p:clrMapOvr>
-    <a:masterClrMapping/>
-  </p:clrMapOvr>
-</p:sld>
-</file>
-
-<file path=ppt/slides/slide32.xml><?xml version="1.0" encoding="utf-8"?>
-<p:sld xmlns:a="http://schemas.openxmlformats.org/drawingml/2006/main" xmlns:r="http://schemas.openxmlformats.org/officeDocument/2006/relationships" xmlns:p="http://schemas.openxmlformats.org/presentationml/2006/main">
-  <p:cSld>
-    <p:spTree>
-      <p:nvGrpSpPr>
-        <p:cNvPr id="1" name="">
-          <a:extLst>
-            <a:ext uri="{FF2B5EF4-FFF2-40B4-BE49-F238E27FC236}">
-              <a16:creationId xmlns:a16="http://schemas.microsoft.com/office/drawing/2014/main" id="{DED54CAD-A94A-BAA7-1894-36B7D6413A05}"/>
-            </a:ext>
-          </a:extLst>
-        </p:cNvPr>
-        <p:cNvGrpSpPr/>
-        <p:nvPr/>
-      </p:nvGrpSpPr>
-      <p:grpSpPr>
-        <a:xfrm>
-          <a:off x="0" y="0"/>
-          <a:ext cx="0" cy="0"/>
-          <a:chOff x="0" y="0"/>
-          <a:chExt cx="0" cy="0"/>
-        </a:xfrm>
-      </p:grpSpPr>
-      <p:sp>
-        <p:nvSpPr>
-          <p:cNvPr id="2" name="Titre 1">
-            <a:extLst>
-              <a:ext uri="{FF2B5EF4-FFF2-40B4-BE49-F238E27FC236}">
-                <a16:creationId xmlns:a16="http://schemas.microsoft.com/office/drawing/2014/main" id="{8CCFDC90-28F1-5F66-54C6-FD7B42473896}"/>
-              </a:ext>
-            </a:extLst>
-          </p:cNvPr>
-          <p:cNvSpPr>
-            <a:spLocks noGrp="1"/>
-          </p:cNvSpPr>
-          <p:nvPr>
-            <p:ph type="title"/>
-          </p:nvPr>
-        </p:nvSpPr>
-        <p:spPr/>
-        <p:txBody>
-          <a:bodyPr/>
-          <a:lstStyle/>
-          <a:p>
-            <a:r>
-              <a:rPr lang="fr-FR" dirty="0"/>
-              <a:t>TP 5</a:t>
-            </a:r>
-          </a:p>
-        </p:txBody>
-      </p:sp>
-      <p:sp>
-        <p:nvSpPr>
-          <p:cNvPr id="3" name="Espace réservé du contenu 2">
-            <a:extLst>
-              <a:ext uri="{FF2B5EF4-FFF2-40B4-BE49-F238E27FC236}">
-                <a16:creationId xmlns:a16="http://schemas.microsoft.com/office/drawing/2014/main" id="{A3F8C913-35E5-771C-304B-96863F7BD035}"/>
-              </a:ext>
-            </a:extLst>
-          </p:cNvPr>
-          <p:cNvSpPr>
-            <a:spLocks noGrp="1"/>
-          </p:cNvSpPr>
-          <p:nvPr>
-            <p:ph idx="1"/>
-          </p:nvPr>
-        </p:nvSpPr>
-        <p:spPr/>
-        <p:txBody>
-          <a:bodyPr/>
-          <a:lstStyle/>
-          <a:p>
-            <a:r>
-              <a:rPr lang="fr-FR" dirty="0" err="1"/>
-              <a:t>kNN</a:t>
-            </a:r>
-            <a:r>
-              <a:rPr lang="fr-FR" dirty="0"/>
-              <a:t> MNIST</a:t>
-            </a:r>
-          </a:p>
-          <a:p>
-            <a:r>
-              <a:rPr lang="fr-FR" dirty="0"/>
-              <a:t>Création d'un </a:t>
-            </a:r>
-            <a:r>
-              <a:rPr lang="fr-FR" dirty="0" err="1"/>
-              <a:t>kNN</a:t>
-            </a:r>
-            <a:r>
-              <a:rPr lang="fr-FR" dirty="0"/>
-              <a:t> par </a:t>
-            </a:r>
-            <a:r>
-              <a:rPr lang="fr-FR" dirty="0" err="1"/>
-              <a:t>SKLearn</a:t>
-            </a:r>
-            <a:endParaRPr lang="fr-FR" dirty="0"/>
-          </a:p>
-          <a:p>
-            <a:r>
-              <a:rPr lang="fr-FR" dirty="0"/>
-              <a:t>Normalisation</a:t>
-            </a:r>
-          </a:p>
-          <a:p>
-            <a:r>
-              <a:rPr lang="fr-FR" dirty="0"/>
-              <a:t>Portage sur ESP32 ? </a:t>
-            </a:r>
-            <a:r>
-              <a:rPr lang="fr-FR"/>
-              <a:t>Possible ?</a:t>
-            </a:r>
-            <a:endParaRPr lang="fr-FR" dirty="0"/>
-          </a:p>
-          <a:p>
-            <a:endParaRPr lang="fr-FR" dirty="0"/>
-          </a:p>
-        </p:txBody>
-      </p:sp>
-    </p:spTree>
-    <p:extLst>
-      <p:ext uri="{BB962C8B-B14F-4D97-AF65-F5344CB8AC3E}">
-        <p14:creationId xmlns:p14="http://schemas.microsoft.com/office/powerpoint/2010/main" val="2449944777"/>
       </p:ext>
     </p:extLst>
   </p:cSld>
